--- a/11-outputs/Suez-Tunnel/04_linked_executive_dashboard.pptx
+++ b/11-outputs/Suez-Tunnel/04_linked_executive_dashboard.pptx
@@ -3856,7 +3856,7 @@
               </a:defRPr>
             </a:pPr>
             <a:r>
-              <a:t>Generated 01 Aug 2026 | Source-controlled selected-project output</a:t>
+              <a:t>Generated 02 Aug 2026 | Source-controlled selected-project output</a:t>
             </a:r>
           </a:p>
         </p:txBody>

--- a/11-outputs/Suez-Tunnel/04_linked_executive_dashboard.pptx
+++ b/11-outputs/Suez-Tunnel/04_linked_executive_dashboard.pptx
@@ -3856,7 +3856,7 @@
               </a:defRPr>
             </a:pPr>
             <a:r>
-              <a:t>Generated 02 Aug 2026 | Source-controlled selected-project output</a:t>
+              <a:t>Generated 05 Aug 2026 | Source-controlled selected-project output</a:t>
             </a:r>
           </a:p>
         </p:txBody>
